--- a/examples/biomedical-mechanism-demo/outputs/tech-route.pptx
+++ b/examples/biomedical-mechanism-demo/outputs/tech-route.pptx
@@ -172,7 +172,7 @@
         <p:spPr>
           <a:xfrm>
             <a:off x="649938" y="2522188"/>
-            <a:ext cx="5558122" cy="1230580"/>
+            <a:ext cx="5558122" cy="1220325"/>
           </a:xfrm>
           <a:prstGeom prst="roundRect">
             <a:avLst/>
@@ -249,8 +249,8 @@
         </p:nvSpPr>
         <p:spPr>
           <a:xfrm>
-            <a:off x="649938" y="3998885"/>
-            <a:ext cx="5558122" cy="1230580"/>
+            <a:off x="649938" y="3988630"/>
+            <a:ext cx="5558122" cy="1220325"/>
           </a:xfrm>
           <a:prstGeom prst="roundRect">
             <a:avLst/>
@@ -288,7 +288,7 @@
         </p:nvSpPr>
         <p:spPr>
           <a:xfrm>
-            <a:off x="2029000" y="4188885"/>
+            <a:off x="2029000" y="4178630"/>
             <a:ext cx="2800000" cy="430000"/>
           </a:xfrm>
           <a:prstGeom prst="roundRect">
@@ -327,8 +327,8 @@
         </p:nvSpPr>
         <p:spPr>
           <a:xfrm>
-            <a:off x="649938" y="5475582"/>
-            <a:ext cx="5558122" cy="1230580"/>
+            <a:off x="649938" y="5455072"/>
+            <a:ext cx="5558122" cy="1220325"/>
           </a:xfrm>
           <a:prstGeom prst="roundRect">
             <a:avLst/>
@@ -366,7 +366,7 @@
         </p:nvSpPr>
         <p:spPr>
           <a:xfrm>
-            <a:off x="2029000" y="5665582"/>
+            <a:off x="2029000" y="5645072"/>
             <a:ext cx="2800000" cy="430000"/>
           </a:xfrm>
           <a:prstGeom prst="roundRect">
@@ -405,8 +405,8 @@
         </p:nvSpPr>
         <p:spPr>
           <a:xfrm>
-            <a:off x="649938" y="6952279"/>
-            <a:ext cx="5558122" cy="1230580"/>
+            <a:off x="649938" y="6921514"/>
+            <a:ext cx="5558122" cy="1220325"/>
           </a:xfrm>
           <a:prstGeom prst="roundRect">
             <a:avLst/>
@@ -444,7 +444,7 @@
         </p:nvSpPr>
         <p:spPr>
           <a:xfrm>
-            <a:off x="2029000" y="7142279"/>
+            <a:off x="2029000" y="7111514"/>
             <a:ext cx="2800000" cy="430000"/>
           </a:xfrm>
           <a:prstGeom prst="roundRect">
@@ -483,8 +483,8 @@
         </p:nvSpPr>
         <p:spPr>
           <a:xfrm>
-            <a:off x="649938" y="8428975"/>
-            <a:ext cx="5558122" cy="1230580"/>
+            <a:off x="649938" y="8387956"/>
+            <a:ext cx="5558122" cy="1220325"/>
           </a:xfrm>
           <a:prstGeom prst="roundRect">
             <a:avLst/>
@@ -522,7 +522,7 @@
         </p:nvSpPr>
         <p:spPr>
           <a:xfrm>
-            <a:off x="2029000" y="8618975"/>
+            <a:off x="2029000" y="8577956"/>
             <a:ext cx="2800000" cy="430000"/>
           </a:xfrm>
           <a:prstGeom prst="roundRect">
@@ -561,7 +561,7 @@
         </p:nvCxnSpPr>
         <p:spPr>
           <a:xfrm>
-            <a:off x="3429000" y="3752769"/>
+            <a:off x="3429000" y="3742514"/>
             <a:ext cx="1" cy="246116"/>
           </a:xfrm>
           <a:prstGeom prst="line">
@@ -583,7 +583,7 @@
         </p:nvCxnSpPr>
         <p:spPr>
           <a:xfrm>
-            <a:off x="3429000" y="5229466"/>
+            <a:off x="3429000" y="5208956"/>
             <a:ext cx="1" cy="246116"/>
           </a:xfrm>
           <a:prstGeom prst="line">
@@ -605,7 +605,7 @@
         </p:nvCxnSpPr>
         <p:spPr>
           <a:xfrm>
-            <a:off x="3429000" y="6706162"/>
+            <a:off x="3429000" y="6675398"/>
             <a:ext cx="1" cy="246116"/>
           </a:xfrm>
           <a:prstGeom prst="line">
@@ -627,7 +627,7 @@
         </p:nvCxnSpPr>
         <p:spPr>
           <a:xfrm>
-            <a:off x="3429000" y="8182859"/>
+            <a:off x="3429000" y="8141840"/>
             <a:ext cx="1" cy="246116"/>
           </a:xfrm>
           <a:prstGeom prst="line">
@@ -727,7 +727,7 @@
         </p:nvSpPr>
         <p:spPr>
           <a:xfrm>
-            <a:off x="834525" y="4583411"/>
+            <a:off x="834525" y="4573156"/>
             <a:ext cx="1668120" cy="440958"/>
           </a:xfrm>
           <a:prstGeom prst="roundRect">
@@ -766,7 +766,7 @@
         </p:nvSpPr>
         <p:spPr>
           <a:xfrm>
-            <a:off x="2594939" y="4583411"/>
+            <a:off x="2594939" y="4573156"/>
             <a:ext cx="1668120" cy="440958"/>
           </a:xfrm>
           <a:prstGeom prst="roundRect">
@@ -805,7 +805,7 @@
         </p:nvSpPr>
         <p:spPr>
           <a:xfrm>
-            <a:off x="4355353" y="4583411"/>
+            <a:off x="4355353" y="4573156"/>
             <a:ext cx="1668120" cy="440958"/>
           </a:xfrm>
           <a:prstGeom prst="roundRect">
@@ -844,7 +844,7 @@
         </p:nvSpPr>
         <p:spPr>
           <a:xfrm>
-            <a:off x="834525" y="6060108"/>
+            <a:off x="834525" y="6039598"/>
             <a:ext cx="2548327" cy="440958"/>
           </a:xfrm>
           <a:prstGeom prst="roundRect">
@@ -883,7 +883,7 @@
         </p:nvSpPr>
         <p:spPr>
           <a:xfrm>
-            <a:off x="3475146" y="6060108"/>
+            <a:off x="3475146" y="6039598"/>
             <a:ext cx="2548327" cy="440958"/>
           </a:xfrm>
           <a:prstGeom prst="roundRect">
@@ -922,7 +922,7 @@
         </p:nvSpPr>
         <p:spPr>
           <a:xfrm>
-            <a:off x="834525" y="7536804"/>
+            <a:off x="834525" y="7506040"/>
             <a:ext cx="1668120" cy="440958"/>
           </a:xfrm>
           <a:prstGeom prst="roundRect">
@@ -961,7 +961,7 @@
         </p:nvSpPr>
         <p:spPr>
           <a:xfrm>
-            <a:off x="2594939" y="7536804"/>
+            <a:off x="2594939" y="7506040"/>
             <a:ext cx="1668120" cy="440958"/>
           </a:xfrm>
           <a:prstGeom prst="roundRect">
@@ -1000,7 +1000,7 @@
         </p:nvSpPr>
         <p:spPr>
           <a:xfrm>
-            <a:off x="4355353" y="7536804"/>
+            <a:off x="4355353" y="7506040"/>
             <a:ext cx="1668120" cy="440958"/>
           </a:xfrm>
           <a:prstGeom prst="roundRect">
@@ -1039,7 +1039,7 @@
         </p:nvSpPr>
         <p:spPr>
           <a:xfrm>
-            <a:off x="834525" y="9013501"/>
+            <a:off x="834525" y="8972482"/>
             <a:ext cx="2548327" cy="440958"/>
           </a:xfrm>
           <a:prstGeom prst="roundRect">
@@ -1078,7 +1078,7 @@
         </p:nvSpPr>
         <p:spPr>
           <a:xfrm>
-            <a:off x="3475146" y="9013501"/>
+            <a:off x="3475146" y="8972482"/>
             <a:ext cx="2548327" cy="440958"/>
           </a:xfrm>
           <a:prstGeom prst="roundRect">
